--- a/Student Performance Analysis.pptx
+++ b/Student Performance Analysis.pptx
@@ -6489,42 +6489,6 @@
           </a:blipFill>
         </p:spPr>
       </p:sp>
-      <p:pic>
-        <p:nvPicPr>
-          <p:cNvPr id="6" name="Picture 5">
-            <a:extLst>
-              <a:ext uri="{FF2B5EF4-FFF2-40B4-BE49-F238E27FC236}">
-                <a16:creationId xmlns:a16="http://schemas.microsoft.com/office/drawing/2014/main" id="{63C55A9C-9B32-7DB4-94C0-3E6DBBA97153}"/>
-              </a:ext>
-            </a:extLst>
-          </p:cNvPr>
-          <p:cNvPicPr>
-            <a:picLocks noChangeAspect="1"/>
-          </p:cNvPicPr>
-          <p:nvPr/>
-        </p:nvPicPr>
-        <p:blipFill>
-          <a:blip r:embed="rId3">
-            <a:extLst>
-              <a:ext uri="{28A0092B-C50C-407E-A947-70E740481C1C}">
-                <a14:useLocalDpi xmlns:a14="http://schemas.microsoft.com/office/drawing/2010/main" val="0"/>
-              </a:ext>
-            </a:extLst>
-          </a:blip>
-          <a:stretch>
-            <a:fillRect/>
-          </a:stretch>
-        </p:blipFill>
-        <p:spPr>
-          <a:xfrm>
-            <a:off x="4481698" y="1961990"/>
-            <a:ext cx="9462901" cy="6271366"/>
-          </a:xfrm>
-          <a:prstGeom prst="rect">
-            <a:avLst/>
-          </a:prstGeom>
-        </p:spPr>
-      </p:pic>
       <p:grpSp>
         <p:nvGrpSpPr>
           <p:cNvPr id="7" name="Group 3">
@@ -6687,6 +6651,42 @@
           </a:p>
         </p:txBody>
       </p:sp>
+      <p:pic>
+        <p:nvPicPr>
+          <p:cNvPr id="12" name="Picture 11">
+            <a:extLst>
+              <a:ext uri="{FF2B5EF4-FFF2-40B4-BE49-F238E27FC236}">
+                <a16:creationId xmlns:a16="http://schemas.microsoft.com/office/drawing/2014/main" id="{647CC672-54A3-DF93-F3CA-F52A57528A33}"/>
+              </a:ext>
+            </a:extLst>
+          </p:cNvPr>
+          <p:cNvPicPr>
+            <a:picLocks noChangeAspect="1"/>
+          </p:cNvPicPr>
+          <p:nvPr/>
+        </p:nvPicPr>
+        <p:blipFill>
+          <a:blip r:embed="rId3">
+            <a:extLst>
+              <a:ext uri="{28A0092B-C50C-407E-A947-70E740481C1C}">
+                <a14:useLocalDpi xmlns:a14="http://schemas.microsoft.com/office/drawing/2010/main" val="0"/>
+              </a:ext>
+            </a:extLst>
+          </a:blip>
+          <a:stretch>
+            <a:fillRect/>
+          </a:stretch>
+        </p:blipFill>
+        <p:spPr>
+          <a:xfrm>
+            <a:off x="4571990" y="2247900"/>
+            <a:ext cx="9242331" cy="5730245"/>
+          </a:xfrm>
+          <a:prstGeom prst="rect">
+            <a:avLst/>
+          </a:prstGeom>
+        </p:spPr>
+      </p:pic>
     </p:spTree>
   </p:cSld>
   <p:clrMapOvr>

--- a/Student Performance Analysis.pptx
+++ b/Student Performance Analysis.pptx
@@ -8436,7 +8436,7 @@
               </a:lnSpc>
             </a:pPr>
             <a:r>
-              <a:rPr lang="en-US" sz="6000" dirty="0">
+              <a:rPr lang="en-US" sz="6000">
                 <a:solidFill>
                   <a:srgbClr val="1C74BB"/>
                 </a:solidFill>
@@ -8445,7 +8445,19 @@
                 <a:cs typeface="Poppins"/>
                 <a:sym typeface="Poppins"/>
               </a:rPr>
-              <a:t>Roll No.    : 23BCE9372</a:t>
+              <a:t>Reg No</a:t>
+            </a:r>
+            <a:r>
+              <a:rPr lang="en-US" sz="6000" dirty="0">
+                <a:solidFill>
+                  <a:srgbClr val="1C74BB"/>
+                </a:solidFill>
+                <a:latin typeface="Poppins"/>
+                <a:ea typeface="Poppins"/>
+                <a:cs typeface="Poppins"/>
+                <a:sym typeface="Poppins"/>
+              </a:rPr>
+              <a:t>.    : 23BCE9372</a:t>
             </a:r>
           </a:p>
         </p:txBody>
